--- a/chapter13/parts/part-02-challenges-and-standards/clip.pptx
+++ b/chapter13/parts/part-02-challenges-and-standards/clip.pptx
@@ -4326,10 +4326,12 @@
           </a:bodyPr>
           <a:lstStyle/>
           <a:p>
-            <a:pPr>
+            <a:pPr lvl="0" marL="457200" indent="-228600">
+              <a:buFont typeface="Calibri"/>
               <a:spcAft>
                 <a:spcPts val="1000"/>
               </a:spcAft>
+              <a:buSzPct val="100000"/>
               <a:buChar char="•"/>
               <a:lnSpc>
                 <a:spcPts val="2200"/>
@@ -4346,10 +4348,12 @@
             </a:r>
           </a:p>
           <a:p>
-            <a:pPr>
+            <a:pPr lvl="0" marL="457200" indent="-228600">
+              <a:buFont typeface="Calibri"/>
               <a:spcAft>
                 <a:spcPts val="1000"/>
               </a:spcAft>
+              <a:buSzPct val="100000"/>
               <a:buChar char="•"/>
               <a:lnSpc>
                 <a:spcPts val="2200"/>
@@ -4485,10 +4489,12 @@
           </a:bodyPr>
           <a:lstStyle/>
           <a:p>
-            <a:pPr>
+            <a:pPr lvl="0" marL="457200" indent="-228600">
+              <a:buFont typeface="Calibri"/>
               <a:spcAft>
                 <a:spcPts val="1000"/>
               </a:spcAft>
+              <a:buSzPct val="100000"/>
               <a:buChar char="•"/>
               <a:lnSpc>
                 <a:spcPts val="2200"/>
@@ -4624,10 +4630,12 @@
           </a:bodyPr>
           <a:lstStyle/>
           <a:p>
-            <a:pPr>
+            <a:pPr lvl="0" marL="457200" indent="-228600">
+              <a:buFont typeface="Calibri"/>
               <a:spcAft>
                 <a:spcPts val="1000"/>
               </a:spcAft>
+              <a:buSzPct val="100000"/>
               <a:buChar char="•"/>
               <a:lnSpc>
                 <a:spcPts val="2200"/>
@@ -4644,10 +4652,12 @@
             </a:r>
           </a:p>
           <a:p>
-            <a:pPr>
+            <a:pPr lvl="0" marL="457200" indent="-228600">
+              <a:buFont typeface="Calibri"/>
               <a:spcAft>
                 <a:spcPts val="1000"/>
               </a:spcAft>
+              <a:buSzPct val="100000"/>
               <a:buChar char="•"/>
               <a:lnSpc>
                 <a:spcPts val="2200"/>
@@ -4664,10 +4674,12 @@
             </a:r>
           </a:p>
           <a:p>
-            <a:pPr>
+            <a:pPr lvl="0" marL="457200" indent="-228600">
+              <a:buFont typeface="Calibri"/>
               <a:spcAft>
                 <a:spcPts val="1000"/>
               </a:spcAft>
+              <a:buSzPct val="100000"/>
               <a:buChar char="•"/>
               <a:lnSpc>
                 <a:spcPts val="2200"/>
@@ -4684,10 +4696,12 @@
             </a:r>
           </a:p>
           <a:p>
-            <a:pPr>
+            <a:pPr lvl="0" marL="457200" indent="-228600">
+              <a:buFont typeface="Calibri"/>
               <a:spcAft>
                 <a:spcPts val="1000"/>
               </a:spcAft>
+              <a:buSzPct val="100000"/>
               <a:buChar char="•"/>
               <a:lnSpc>
                 <a:spcPts val="2200"/>
@@ -4704,10 +4718,12 @@
             </a:r>
           </a:p>
           <a:p>
-            <a:pPr>
+            <a:pPr lvl="0" marL="457200" indent="-228600">
+              <a:buFont typeface="Calibri"/>
               <a:spcAft>
                 <a:spcPts val="1000"/>
               </a:spcAft>
+              <a:buSzPct val="100000"/>
               <a:buChar char="•"/>
               <a:lnSpc>
                 <a:spcPts val="2200"/>
@@ -4843,10 +4859,12 @@
           </a:bodyPr>
           <a:lstStyle/>
           <a:p>
-            <a:pPr>
+            <a:pPr lvl="0" marL="457200" indent="-228600">
+              <a:buFont typeface="Calibri"/>
               <a:spcAft>
                 <a:spcPts val="1000"/>
               </a:spcAft>
+              <a:buSzPct val="100000"/>
               <a:buChar char="•"/>
               <a:lnSpc>
                 <a:spcPts val="2200"/>
@@ -4863,10 +4881,12 @@
             </a:r>
           </a:p>
           <a:p>
-            <a:pPr>
+            <a:pPr lvl="0" marL="457200" indent="-228600">
+              <a:buFont typeface="Calibri"/>
               <a:spcAft>
                 <a:spcPts val="1000"/>
               </a:spcAft>
+              <a:buSzPct val="100000"/>
               <a:buChar char="•"/>
               <a:lnSpc>
                 <a:spcPts val="2200"/>
@@ -4883,10 +4903,12 @@
             </a:r>
           </a:p>
           <a:p>
-            <a:pPr>
+            <a:pPr lvl="0" marL="457200" indent="-228600">
+              <a:buFont typeface="Calibri"/>
               <a:spcAft>
                 <a:spcPts val="1000"/>
               </a:spcAft>
+              <a:buSzPct val="100000"/>
               <a:buChar char="•"/>
               <a:lnSpc>
                 <a:spcPts val="2200"/>
@@ -4903,10 +4925,12 @@
             </a:r>
           </a:p>
           <a:p>
-            <a:pPr>
+            <a:pPr lvl="0" marL="457200" indent="-228600">
+              <a:buFont typeface="Calibri"/>
               <a:spcAft>
                 <a:spcPts val="1000"/>
               </a:spcAft>
+              <a:buSzPct val="100000"/>
               <a:buChar char="•"/>
               <a:lnSpc>
                 <a:spcPts val="2200"/>
@@ -4923,10 +4947,12 @@
             </a:r>
           </a:p>
           <a:p>
-            <a:pPr>
+            <a:pPr lvl="0" marL="457200" indent="-228600">
+              <a:buFont typeface="Calibri"/>
               <a:spcAft>
                 <a:spcPts val="1000"/>
               </a:spcAft>
+              <a:buSzPct val="100000"/>
               <a:buChar char="•"/>
               <a:lnSpc>
                 <a:spcPts val="2200"/>
@@ -4943,10 +4969,12 @@
             </a:r>
           </a:p>
           <a:p>
-            <a:pPr>
+            <a:pPr lvl="0" marL="457200" indent="-228600">
+              <a:buFont typeface="Calibri"/>
               <a:spcAft>
                 <a:spcPts val="1000"/>
               </a:spcAft>
+              <a:buSzPct val="100000"/>
               <a:buChar char="•"/>
               <a:lnSpc>
                 <a:spcPts val="2200"/>
@@ -5082,10 +5110,12 @@
           </a:bodyPr>
           <a:lstStyle/>
           <a:p>
-            <a:pPr>
+            <a:pPr lvl="0" marL="457200" indent="-228600">
+              <a:buFont typeface="Calibri"/>
               <a:spcAft>
                 <a:spcPts val="1000"/>
               </a:spcAft>
+              <a:buSzPct val="100000"/>
               <a:buChar char="•"/>
               <a:lnSpc>
                 <a:spcPts val="2200"/>
@@ -5102,10 +5132,12 @@
             </a:r>
           </a:p>
           <a:p>
-            <a:pPr>
+            <a:pPr lvl="0" marL="457200" indent="-228600">
+              <a:buFont typeface="Calibri"/>
               <a:spcAft>
                 <a:spcPts val="1000"/>
               </a:spcAft>
+              <a:buSzPct val="100000"/>
               <a:buChar char="•"/>
               <a:lnSpc>
                 <a:spcPts val="2200"/>
@@ -5122,10 +5154,12 @@
             </a:r>
           </a:p>
           <a:p>
-            <a:pPr>
+            <a:pPr lvl="0" marL="457200" indent="-228600">
+              <a:buFont typeface="Calibri"/>
               <a:spcAft>
                 <a:spcPts val="1000"/>
               </a:spcAft>
+              <a:buSzPct val="100000"/>
               <a:buChar char="•"/>
               <a:lnSpc>
                 <a:spcPts val="2200"/>
@@ -5142,10 +5176,12 @@
             </a:r>
           </a:p>
           <a:p>
-            <a:pPr>
+            <a:pPr lvl="0" marL="457200" indent="-228600">
+              <a:buFont typeface="Calibri"/>
               <a:spcAft>
                 <a:spcPts val="1000"/>
               </a:spcAft>
+              <a:buSzPct val="100000"/>
               <a:buChar char="•"/>
               <a:lnSpc>
                 <a:spcPts val="2200"/>
@@ -5162,10 +5198,12 @@
             </a:r>
           </a:p>
           <a:p>
-            <a:pPr>
+            <a:pPr lvl="0" marL="457200" indent="-228600">
+              <a:buFont typeface="Calibri"/>
               <a:spcAft>
                 <a:spcPts val="1000"/>
               </a:spcAft>
+              <a:buSzPct val="100000"/>
               <a:buChar char="•"/>
               <a:lnSpc>
                 <a:spcPts val="2200"/>
@@ -5182,10 +5220,12 @@
             </a:r>
           </a:p>
           <a:p>
-            <a:pPr>
+            <a:pPr lvl="0" marL="457200" indent="-228600">
+              <a:buFont typeface="Calibri"/>
               <a:spcAft>
                 <a:spcPts val="1000"/>
               </a:spcAft>
+              <a:buSzPct val="100000"/>
               <a:buChar char="•"/>
               <a:lnSpc>
                 <a:spcPts val="2200"/>
@@ -5321,10 +5361,12 @@
           </a:bodyPr>
           <a:lstStyle/>
           <a:p>
-            <a:pPr>
+            <a:pPr lvl="0" marL="457200" indent="-228600">
+              <a:buFont typeface="Calibri"/>
               <a:spcAft>
                 <a:spcPts val="1000"/>
               </a:spcAft>
+              <a:buSzPct val="100000"/>
               <a:buChar char="•"/>
               <a:lnSpc>
                 <a:spcPts val="2200"/>
@@ -5341,10 +5383,12 @@
             </a:r>
           </a:p>
           <a:p>
-            <a:pPr>
+            <a:pPr lvl="0" marL="457200" indent="-228600">
+              <a:buFont typeface="Calibri"/>
               <a:spcAft>
                 <a:spcPts val="1000"/>
               </a:spcAft>
+              <a:buSzPct val="100000"/>
               <a:buChar char="•"/>
               <a:lnSpc>
                 <a:spcPts val="2200"/>
@@ -5361,10 +5405,12 @@
             </a:r>
           </a:p>
           <a:p>
-            <a:pPr>
+            <a:pPr lvl="0" marL="457200" indent="-228600">
+              <a:buFont typeface="Calibri"/>
               <a:spcAft>
                 <a:spcPts val="1000"/>
               </a:spcAft>
+              <a:buSzPct val="100000"/>
               <a:buChar char="•"/>
               <a:lnSpc>
                 <a:spcPts val="2200"/>
@@ -5381,10 +5427,12 @@
             </a:r>
           </a:p>
           <a:p>
-            <a:pPr>
+            <a:pPr lvl="0" marL="457200" indent="-228600">
+              <a:buFont typeface="Calibri"/>
               <a:spcAft>
                 <a:spcPts val="1000"/>
               </a:spcAft>
+              <a:buSzPct val="100000"/>
               <a:buChar char="•"/>
               <a:lnSpc>
                 <a:spcPts val="2200"/>
@@ -5401,10 +5449,12 @@
             </a:r>
           </a:p>
           <a:p>
-            <a:pPr>
+            <a:pPr lvl="0" marL="457200" indent="-228600">
+              <a:buFont typeface="Calibri"/>
               <a:spcAft>
                 <a:spcPts val="1000"/>
               </a:spcAft>
+              <a:buSzPct val="100000"/>
               <a:buChar char="•"/>
               <a:lnSpc>
                 <a:spcPts val="2200"/>
@@ -5421,10 +5471,12 @@
             </a:r>
           </a:p>
           <a:p>
-            <a:pPr>
+            <a:pPr lvl="0" marL="457200" indent="-228600">
+              <a:buFont typeface="Calibri"/>
               <a:spcAft>
                 <a:spcPts val="1000"/>
               </a:spcAft>
+              <a:buSzPct val="100000"/>
               <a:buChar char="•"/>
               <a:lnSpc>
                 <a:spcPts val="2200"/>
@@ -5560,10 +5612,12 @@
           </a:bodyPr>
           <a:lstStyle/>
           <a:p>
-            <a:pPr>
+            <a:pPr lvl="0" marL="457200" indent="-228600">
+              <a:buFont typeface="Calibri"/>
               <a:spcAft>
                 <a:spcPts val="1000"/>
               </a:spcAft>
+              <a:buSzPct val="100000"/>
               <a:buChar char="•"/>
               <a:lnSpc>
                 <a:spcPts val="2200"/>
@@ -5580,10 +5634,12 @@
             </a:r>
           </a:p>
           <a:p>
-            <a:pPr>
+            <a:pPr lvl="0" marL="457200" indent="-228600">
+              <a:buFont typeface="Calibri"/>
               <a:spcAft>
                 <a:spcPts val="1000"/>
               </a:spcAft>
+              <a:buSzPct val="100000"/>
               <a:buChar char="•"/>
               <a:lnSpc>
                 <a:spcPts val="2200"/>
@@ -5600,10 +5656,12 @@
             </a:r>
           </a:p>
           <a:p>
-            <a:pPr>
+            <a:pPr lvl="0" marL="457200" indent="-228600">
+              <a:buFont typeface="Calibri"/>
               <a:spcAft>
                 <a:spcPts val="1000"/>
               </a:spcAft>
+              <a:buSzPct val="100000"/>
               <a:buChar char="•"/>
               <a:lnSpc>
                 <a:spcPts val="2200"/>
@@ -5620,10 +5678,12 @@
             </a:r>
           </a:p>
           <a:p>
-            <a:pPr>
+            <a:pPr lvl="0" marL="457200" indent="-228600">
+              <a:buFont typeface="Calibri"/>
               <a:spcAft>
                 <a:spcPts val="1000"/>
               </a:spcAft>
+              <a:buSzPct val="100000"/>
               <a:buChar char="•"/>
               <a:lnSpc>
                 <a:spcPts val="2200"/>
@@ -5640,10 +5700,12 @@
             </a:r>
           </a:p>
           <a:p>
-            <a:pPr>
+            <a:pPr lvl="0" marL="457200" indent="-228600">
+              <a:buFont typeface="Calibri"/>
               <a:spcAft>
                 <a:spcPts val="1000"/>
               </a:spcAft>
+              <a:buSzPct val="100000"/>
               <a:buChar char="•"/>
               <a:lnSpc>
                 <a:spcPts val="2200"/>
@@ -5660,10 +5722,12 @@
             </a:r>
           </a:p>
           <a:p>
-            <a:pPr>
+            <a:pPr lvl="0" marL="457200" indent="-228600">
+              <a:buFont typeface="Calibri"/>
               <a:spcAft>
                 <a:spcPts val="1000"/>
               </a:spcAft>
+              <a:buSzPct val="100000"/>
               <a:buChar char="•"/>
               <a:lnSpc>
                 <a:spcPts val="2200"/>
@@ -5799,10 +5863,12 @@
           </a:bodyPr>
           <a:lstStyle/>
           <a:p>
-            <a:pPr>
+            <a:pPr lvl="0" marL="457200" indent="-228600">
+              <a:buFont typeface="Calibri"/>
               <a:spcAft>
                 <a:spcPts val="1000"/>
               </a:spcAft>
+              <a:buSzPct val="100000"/>
               <a:buChar char="•"/>
               <a:lnSpc>
                 <a:spcPts val="2200"/>
@@ -5819,10 +5885,12 @@
             </a:r>
           </a:p>
           <a:p>
-            <a:pPr>
+            <a:pPr lvl="0" marL="457200" indent="-228600">
+              <a:buFont typeface="Calibri"/>
               <a:spcAft>
                 <a:spcPts val="1000"/>
               </a:spcAft>
+              <a:buSzPct val="100000"/>
               <a:buChar char="•"/>
               <a:lnSpc>
                 <a:spcPts val="2200"/>
@@ -5839,10 +5907,12 @@
             </a:r>
           </a:p>
           <a:p>
-            <a:pPr>
+            <a:pPr lvl="0" marL="457200" indent="-228600">
+              <a:buFont typeface="Calibri"/>
               <a:spcAft>
                 <a:spcPts val="1000"/>
               </a:spcAft>
+              <a:buSzPct val="100000"/>
               <a:buChar char="•"/>
               <a:lnSpc>
                 <a:spcPts val="2200"/>
@@ -5978,10 +6048,12 @@
           </a:bodyPr>
           <a:lstStyle/>
           <a:p>
-            <a:pPr>
+            <a:pPr lvl="0" marL="457200" indent="-228600">
+              <a:buFont typeface="Calibri"/>
               <a:spcAft>
                 <a:spcPts val="1000"/>
               </a:spcAft>
+              <a:buSzPct val="100000"/>
               <a:buChar char="•"/>
               <a:lnSpc>
                 <a:spcPts val="2200"/>
@@ -5998,10 +6070,12 @@
             </a:r>
           </a:p>
           <a:p>
-            <a:pPr>
+            <a:pPr lvl="0" marL="457200" indent="-228600">
+              <a:buFont typeface="Calibri"/>
               <a:spcAft>
                 <a:spcPts val="1000"/>
               </a:spcAft>
+              <a:buSzPct val="100000"/>
               <a:buChar char="•"/>
               <a:lnSpc>
                 <a:spcPts val="2200"/>
@@ -6018,10 +6092,12 @@
             </a:r>
           </a:p>
           <a:p>
-            <a:pPr>
+            <a:pPr lvl="0" marL="457200" indent="-228600">
+              <a:buFont typeface="Calibri"/>
               <a:spcAft>
                 <a:spcPts val="1000"/>
               </a:spcAft>
+              <a:buSzPct val="100000"/>
               <a:buChar char="•"/>
               <a:lnSpc>
                 <a:spcPts val="2200"/>
@@ -6038,10 +6114,12 @@
             </a:r>
           </a:p>
           <a:p>
-            <a:pPr>
+            <a:pPr lvl="0" marL="457200" indent="-228600">
+              <a:buFont typeface="Calibri"/>
               <a:spcAft>
                 <a:spcPts val="1000"/>
               </a:spcAft>
+              <a:buSzPct val="100000"/>
               <a:buChar char="•"/>
               <a:lnSpc>
                 <a:spcPts val="2200"/>
@@ -6058,10 +6136,12 @@
             </a:r>
           </a:p>
           <a:p>
-            <a:pPr>
+            <a:pPr lvl="0" marL="457200" indent="-228600">
+              <a:buFont typeface="Calibri"/>
               <a:spcAft>
                 <a:spcPts val="1000"/>
               </a:spcAft>
+              <a:buSzPct val="100000"/>
               <a:buChar char="•"/>
               <a:lnSpc>
                 <a:spcPts val="2200"/>
